--- a/第1小组 活力方程.pptx
+++ b/第1小组 活力方程.pptx
@@ -326,7 +326,7 @@
             </a:pPr>
             <a:fld id="{B472C63E-AF15-4312-8FBC-8793FA367431}" type="datetimeFigureOut">
               <a:rPr lang="zh-CN" altLang="en-US"/>
-              <a:t>2026/9/13</a:t>
+              <a:t>2026/9/14</a:t>
             </a:fld>
             <a:endParaRPr lang="zh-CN" altLang="en-US"/>
           </a:p>
@@ -534,7 +534,7 @@
             </a:pPr>
             <a:fld id="{C7D3AFAD-6731-4E56-A8E4-26B1CF9D9C84}" type="datetimeFigureOut">
               <a:rPr lang="zh-CN" altLang="en-US"/>
-              <a:t>2026/9/13</a:t>
+              <a:t>2026/9/14</a:t>
             </a:fld>
             <a:endParaRPr lang="zh-CN" altLang="en-US"/>
           </a:p>
@@ -1094,6 +1094,79 @@
               <a:rPr lang="zh-CN" altLang="zh-CN" sz="1200"/>
               <a:t>抗稀释——标题当语义锚，answer 再长，“关于哪个话题”先定调，向量不被长正文冲淡；</a:t>
             </a:r>
+            <a:endParaRPr lang="en-US" altLang="zh-CN" sz="1200"/>
+          </a:p>
+          <a:p>
+            <a:r>
+              <a:rPr lang="zh-CN" altLang="zh-CN"/>
+              <a:t>BM25 补了两处修正</a:t>
+            </a:r>
+            <a:r>
+              <a:rPr lang="zh-CN" altLang="en-US"/>
+              <a:t>：</a:t>
+            </a:r>
+            <a:endParaRPr lang="zh-CN" altLang="zh-CN"/>
+          </a:p>
+          <a:p>
+            <a:r>
+              <a:rPr lang="zh-CN" altLang="zh-CN"/>
+              <a:t>第一处是「词频饱和」。一段</a:t>
+            </a:r>
+            <a:r>
+              <a:rPr lang="zh-CN" altLang="en-US"/>
+              <a:t>文字</a:t>
+            </a:r>
+            <a:r>
+              <a:rPr lang="zh-CN" altLang="zh-CN"/>
+              <a:t>反复出现</a:t>
+            </a:r>
+            <a:r>
+              <a:rPr lang="zh-CN" altLang="en-US"/>
+              <a:t>某</a:t>
+            </a:r>
+            <a:r>
+              <a:rPr lang="zh-CN" altLang="zh-CN"/>
+              <a:t>个词，不代表它跟用户问题的相关度是只出现一次时的十倍，出现到一定次数之后，再往上加分应该慢下来，不然堆词的文档就占了便宜。</a:t>
+            </a:r>
+            <a:endParaRPr lang="en-US" altLang="zh-CN"/>
+          </a:p>
+          <a:p>
+            <a:pPr marL="0" marR="0" lvl="0" indent="0" algn="l" defTabSz="914400" rtl="0" eaLnBrk="0" fontAlgn="base" latinLnBrk="0" hangingPunct="0">
+              <a:lnSpc>
+                <a:spcPct val="100000"/>
+              </a:lnSpc>
+              <a:spcBef>
+                <a:spcPct val="30000"/>
+              </a:spcBef>
+              <a:spcAft>
+                <a:spcPct val="0"/>
+              </a:spcAft>
+              <a:buClrTx/>
+              <a:buSzTx/>
+              <a:buFontTx/>
+              <a:buNone/>
+              <a:tabLst/>
+              <a:defRPr/>
+            </a:pPr>
+            <a:r>
+              <a:rPr lang="zh-CN" altLang="zh-CN"/>
+              <a:t>第二处是「文档长度归一化」。不能因为</a:t>
+            </a:r>
+            <a:r>
+              <a:rPr lang="zh-CN" altLang="en-US"/>
+              <a:t>文档字数多</a:t>
+            </a:r>
+            <a:r>
+              <a:rPr lang="zh-CN" altLang="zh-CN"/>
+              <a:t>就更容易命中，得按文档长度打个折扣，让长短文档站在同一条起跑线上比。</a:t>
+            </a:r>
+          </a:p>
+          <a:p>
+            <a:endParaRPr lang="zh-CN" altLang="zh-CN"/>
+          </a:p>
+          <a:p>
+            <a:pPr lvl="0"/>
+            <a:endParaRPr lang="zh-CN" altLang="zh-CN" sz="1200"/>
           </a:p>
         </p:txBody>
       </p:sp>
@@ -6764,8 +6837,8 @@
         </p:blipFill>
         <p:spPr>
           <a:xfrm>
-            <a:off x="5710813" y="3686095"/>
-            <a:ext cx="5856573" cy="2636919"/>
+            <a:off x="5710813" y="3544677"/>
+            <a:ext cx="6170663" cy="2778338"/>
           </a:xfrm>
           <a:prstGeom prst="rect">
             <a:avLst/>
@@ -7150,8 +7223,8 @@
         </p:nvSpPr>
         <p:spPr>
           <a:xfrm>
-            <a:off x="301625" y="2150257"/>
-            <a:ext cx="5091009" cy="276999"/>
+            <a:off x="301625" y="2046795"/>
+            <a:ext cx="4698402" cy="246221"/>
           </a:xfrm>
           <a:prstGeom prst="rect">
             <a:avLst/>
@@ -7271,38 +7344,39 @@
           <a:p>
             <a:pPr eaLnBrk="1" hangingPunct="1"/>
             <a:r>
-              <a:rPr lang="en-US" altLang="zh-CN">
+              <a:rPr lang="en-US" altLang="zh-CN" sz="1600" b="1">
+                <a:latin typeface="Times New Roman" panose="02020603050405020304" pitchFamily="18" charset="0"/>
+                <a:ea typeface="微软雅黑" panose="020B0503020204020204" pitchFamily="34" charset="-122"/>
+                <a:cs typeface="Times New Roman" panose="02020603050405020304" pitchFamily="18" charset="0"/>
+                <a:sym typeface="+mn-ea"/>
+              </a:rPr>
+              <a:t>1.</a:t>
+            </a:r>
+            <a:r>
+              <a:rPr lang="zh-CN" altLang="en-US" sz="1600" b="1">
                 <a:latin typeface="微软雅黑" panose="020B0503020204020204" pitchFamily="34" charset="-122"/>
                 <a:ea typeface="微软雅黑" panose="020B0503020204020204" pitchFamily="34" charset="-122"/>
                 <a:sym typeface="+mn-ea"/>
               </a:rPr>
-              <a:t>1.</a:t>
-            </a:r>
-            <a:r>
-              <a:rPr lang="zh-CN" altLang="en-US">
+              <a:t>离线知识库</a:t>
+            </a:r>
+            <a:r>
+              <a:rPr lang="en-US" altLang="zh-CN" sz="1600" b="1">
                 <a:latin typeface="微软雅黑" panose="020B0503020204020204" pitchFamily="34" charset="-122"/>
                 <a:ea typeface="微软雅黑" panose="020B0503020204020204" pitchFamily="34" charset="-122"/>
                 <a:sym typeface="+mn-ea"/>
               </a:rPr>
-              <a:t>离线知识库</a:t>
-            </a:r>
-            <a:r>
-              <a:rPr lang="en-US" altLang="zh-CN">
+              <a:t>-</a:t>
+            </a:r>
+            <a:r>
+              <a:rPr lang="en-US" altLang="zh-CN" sz="1600" b="1">
                 <a:latin typeface="微软雅黑" panose="020B0503020204020204" pitchFamily="34" charset="-122"/>
                 <a:ea typeface="微软雅黑" panose="020B0503020204020204" pitchFamily="34" charset="-122"/>
-                <a:sym typeface="+mn-ea"/>
-              </a:rPr>
-              <a:t>-</a:t>
-            </a:r>
-            <a:r>
-              <a:rPr lang="en-US" altLang="zh-CN">
-                <a:latin typeface="微软雅黑" panose="020B0503020204020204" pitchFamily="34" charset="-122"/>
-                <a:ea typeface="微软雅黑" panose="020B0503020204020204" pitchFamily="34" charset="-122"/>
               </a:rPr>
               <a:t>从</a:t>
             </a:r>
             <a:r>
-              <a:rPr lang="en-US" altLang="zh-CN">
+              <a:rPr lang="en-US" altLang="zh-CN" sz="1600" b="1">
                 <a:latin typeface="Times New Roman" panose="02020603050405020304" pitchFamily="18" charset="0"/>
                 <a:ea typeface="微软雅黑" panose="020B0503020204020204" pitchFamily="34" charset="-122"/>
                 <a:cs typeface="Times New Roman" panose="02020603050405020304" pitchFamily="18" charset="0"/>
@@ -7310,29 +7384,29 @@
               <a:t>Markdown</a:t>
             </a:r>
             <a:r>
-              <a:rPr lang="en-US" altLang="zh-CN">
+              <a:rPr lang="en-US" altLang="zh-CN" sz="1600" b="1">
                 <a:latin typeface="微软雅黑" panose="020B0503020204020204" pitchFamily="34" charset="-122"/>
                 <a:ea typeface="微软雅黑" panose="020B0503020204020204" pitchFamily="34" charset="-122"/>
               </a:rPr>
               <a:t>到可检索的</a:t>
             </a:r>
             <a:r>
-              <a:rPr lang="en-US" altLang="zh-CN">
+              <a:rPr lang="en-US" altLang="zh-CN" sz="1600" b="1">
                 <a:latin typeface="Times New Roman" panose="02020603050405020304" pitchFamily="18" charset="0"/>
                 <a:ea typeface="微软雅黑" panose="020B0503020204020204" pitchFamily="34" charset="-122"/>
                 <a:cs typeface="Times New Roman" panose="02020603050405020304" pitchFamily="18" charset="0"/>
               </a:rPr>
-              <a:t>Trunk</a:t>
-            </a:r>
-            <a:r>
-              <a:rPr lang="zh-CN" altLang="en-US">
+              <a:t>Chunk</a:t>
+            </a:r>
+            <a:r>
+              <a:rPr lang="zh-CN" altLang="en-US" sz="1600" b="1">
                 <a:latin typeface="Times New Roman" panose="02020603050405020304" pitchFamily="18" charset="0"/>
                 <a:ea typeface="微软雅黑" panose="020B0503020204020204" pitchFamily="34" charset="-122"/>
                 <a:cs typeface="Times New Roman" panose="02020603050405020304" pitchFamily="18" charset="0"/>
               </a:rPr>
               <a:t>知识块</a:t>
             </a:r>
-            <a:endParaRPr lang="en-US" altLang="zh-CN">
+            <a:endParaRPr lang="en-US" altLang="zh-CN" sz="1600" b="1">
               <a:latin typeface="Times New Roman" panose="02020603050405020304" pitchFamily="18" charset="0"/>
               <a:ea typeface="微软雅黑" panose="020B0503020204020204" pitchFamily="34" charset="-122"/>
               <a:cs typeface="Times New Roman" panose="02020603050405020304" pitchFamily="18" charset="0"/>
@@ -7354,7 +7428,7 @@
         </p:nvSpPr>
         <p:spPr>
           <a:xfrm>
-            <a:off x="234926" y="596771"/>
+            <a:off x="234926" y="534986"/>
             <a:ext cx="11722148" cy="1446550"/>
           </a:xfrm>
           <a:prstGeom prst="rect">
@@ -7369,11 +7443,17 @@
           <a:lstStyle/>
           <a:p>
             <a:r>
-              <a:rPr lang="zh-CN" altLang="zh-CN" sz="1600"/>
+              <a:rPr lang="zh-CN" altLang="zh-CN" sz="1600">
+                <a:latin typeface="微软雅黑" panose="020B0503020204020204" pitchFamily="34" charset="-122"/>
+                <a:ea typeface="微软雅黑" panose="020B0503020204020204" pitchFamily="34" charset="-122"/>
+              </a:rPr>
               <a:t>大模型像一个闭卷考试的学生，知识停留在训练结束的那天</a:t>
             </a:r>
             <a:r>
-              <a:rPr lang="zh-CN" altLang="en-US" sz="1600"/>
+              <a:rPr lang="zh-CN" altLang="en-US" sz="1600">
+                <a:latin typeface="微软雅黑" panose="020B0503020204020204" pitchFamily="34" charset="-122"/>
+                <a:ea typeface="微软雅黑" panose="020B0503020204020204" pitchFamily="34" charset="-122"/>
+              </a:rPr>
               <a:t>。</a:t>
             </a:r>
             <a:r>
@@ -7390,21 +7470,37 @@
             </a:r>
             <a:r>
               <a:rPr lang="zh-CN" altLang="zh-CN" sz="1600"/>
-              <a:t> 就是把闭卷考改成开卷考，核心</a:t>
-            </a:r>
-            <a:r>
-              <a:rPr lang="zh-CN" altLang="en-US" sz="1600"/>
+              <a:t> </a:t>
+            </a:r>
+            <a:r>
+              <a:rPr lang="zh-CN" altLang="zh-CN" sz="1600">
+                <a:latin typeface="微软雅黑" panose="020B0503020204020204" pitchFamily="34" charset="-122"/>
+                <a:ea typeface="微软雅黑" panose="020B0503020204020204" pitchFamily="34" charset="-122"/>
+              </a:rPr>
+              <a:t>就是把闭卷考改成开卷考，核心</a:t>
+            </a:r>
+            <a:r>
+              <a:rPr lang="zh-CN" altLang="en-US" sz="1600">
+                <a:latin typeface="微软雅黑" panose="020B0503020204020204" pitchFamily="34" charset="-122"/>
+                <a:ea typeface="微软雅黑" panose="020B0503020204020204" pitchFamily="34" charset="-122"/>
+              </a:rPr>
               <a:t>分</a:t>
             </a:r>
             <a:r>
-              <a:rPr lang="zh-CN" altLang="zh-CN" sz="1600"/>
+              <a:rPr lang="zh-CN" altLang="zh-CN" sz="1600">
+                <a:latin typeface="微软雅黑" panose="020B0503020204020204" pitchFamily="34" charset="-122"/>
+                <a:ea typeface="微软雅黑" panose="020B0503020204020204" pitchFamily="34" charset="-122"/>
+              </a:rPr>
               <a:t>三步：</a:t>
             </a:r>
           </a:p>
           <a:p>
             <a:pPr lvl="0"/>
             <a:r>
-              <a:rPr lang="zh-CN" altLang="zh-CN" sz="1600"/>
+              <a:rPr lang="zh-CN" altLang="zh-CN" sz="1600">
+                <a:latin typeface="微软雅黑" panose="020B0503020204020204" pitchFamily="34" charset="-122"/>
+                <a:ea typeface="微软雅黑" panose="020B0503020204020204" pitchFamily="34" charset="-122"/>
+              </a:rPr>
               <a:t>检索（</a:t>
             </a:r>
             <a:r>
@@ -7416,14 +7512,20 @@
               <a:t>Retrieval</a:t>
             </a:r>
             <a:r>
-              <a:rPr lang="zh-CN" altLang="zh-CN" sz="1600"/>
+              <a:rPr lang="zh-CN" altLang="zh-CN" sz="1600">
+                <a:latin typeface="微软雅黑" panose="020B0503020204020204" pitchFamily="34" charset="-122"/>
+                <a:ea typeface="微软雅黑" panose="020B0503020204020204" pitchFamily="34" charset="-122"/>
+              </a:rPr>
               <a:t>）：拿到问题，先去你给的外部资料库里翻找相关内容。</a:t>
             </a:r>
           </a:p>
           <a:p>
             <a:pPr lvl="0"/>
             <a:r>
-              <a:rPr lang="zh-CN" altLang="zh-CN" sz="1600"/>
+              <a:rPr lang="zh-CN" altLang="zh-CN" sz="1600">
+                <a:latin typeface="微软雅黑" panose="020B0503020204020204" pitchFamily="34" charset="-122"/>
+                <a:ea typeface="微软雅黑" panose="020B0503020204020204" pitchFamily="34" charset="-122"/>
+              </a:rPr>
               <a:t>增强（</a:t>
             </a:r>
             <a:r>
@@ -7435,14 +7537,20 @@
               <a:t>Augmentation</a:t>
             </a:r>
             <a:r>
-              <a:rPr lang="zh-CN" altLang="zh-CN" sz="1600"/>
+              <a:rPr lang="zh-CN" altLang="zh-CN" sz="1600">
+                <a:latin typeface="微软雅黑" panose="020B0503020204020204" pitchFamily="34" charset="-122"/>
+                <a:ea typeface="微软雅黑" panose="020B0503020204020204" pitchFamily="34" charset="-122"/>
+              </a:rPr>
               <a:t>）：把捞出来的这几段最新资料作为“参考材料”。</a:t>
             </a:r>
           </a:p>
           <a:p>
             <a:pPr lvl="0"/>
             <a:r>
-              <a:rPr lang="zh-CN" altLang="zh-CN" sz="1600"/>
+              <a:rPr lang="zh-CN" altLang="zh-CN" sz="1600">
+                <a:latin typeface="微软雅黑" panose="020B0503020204020204" pitchFamily="34" charset="-122"/>
+                <a:ea typeface="微软雅黑" panose="020B0503020204020204" pitchFamily="34" charset="-122"/>
+              </a:rPr>
               <a:t>生成（</a:t>
             </a:r>
             <a:r>
@@ -7454,21 +7562,33 @@
               <a:t>Generation</a:t>
             </a:r>
             <a:r>
-              <a:rPr lang="zh-CN" altLang="zh-CN" sz="1600"/>
+              <a:rPr lang="zh-CN" altLang="zh-CN" sz="1600">
+                <a:latin typeface="微软雅黑" panose="020B0503020204020204" pitchFamily="34" charset="-122"/>
+                <a:ea typeface="微软雅黑" panose="020B0503020204020204" pitchFamily="34" charset="-122"/>
+              </a:rPr>
               <a:t>）：模型根据参考材料整理出准确的答案。</a:t>
             </a:r>
           </a:p>
           <a:p>
             <a:r>
-              <a:rPr lang="zh-CN" altLang="zh-CN" sz="1600" b="1"/>
+              <a:rPr lang="zh-CN" altLang="zh-CN" sz="1600" b="1">
+                <a:latin typeface="微软雅黑" panose="020B0503020204020204" pitchFamily="34" charset="-122"/>
+                <a:ea typeface="微软雅黑" panose="020B0503020204020204" pitchFamily="34" charset="-122"/>
+              </a:rPr>
               <a:t>核心价值：资料有更新</a:t>
             </a:r>
             <a:r>
-              <a:rPr lang="zh-CN" altLang="en-US" sz="1600" b="1"/>
+              <a:rPr lang="zh-CN" altLang="en-US" sz="1600" b="1">
+                <a:latin typeface="微软雅黑" panose="020B0503020204020204" pitchFamily="34" charset="-122"/>
+                <a:ea typeface="微软雅黑" panose="020B0503020204020204" pitchFamily="34" charset="-122"/>
+              </a:rPr>
               <a:t>直接更新知识库</a:t>
             </a:r>
             <a:r>
-              <a:rPr lang="zh-CN" altLang="zh-CN" sz="1600" b="1"/>
+              <a:rPr lang="zh-CN" altLang="zh-CN" sz="1600" b="1">
+                <a:latin typeface="微软雅黑" panose="020B0503020204020204" pitchFamily="34" charset="-122"/>
+                <a:ea typeface="微软雅黑" panose="020B0503020204020204" pitchFamily="34" charset="-122"/>
+              </a:rPr>
               <a:t>，无需花高昂成本重新训练模型，同时彻底压制模型的幻觉胡编。</a:t>
             </a:r>
           </a:p>
@@ -7488,7 +7608,7 @@
         </p:nvSpPr>
         <p:spPr>
           <a:xfrm>
-            <a:off x="665163" y="2535078"/>
+            <a:off x="665163" y="2393659"/>
             <a:ext cx="2261339" cy="1123564"/>
           </a:xfrm>
           <a:prstGeom prst="roundRect">
@@ -7527,7 +7647,7 @@
         </p:nvSpPr>
         <p:spPr>
           <a:xfrm>
-            <a:off x="957422" y="2625594"/>
+            <a:off x="957422" y="2484175"/>
             <a:ext cx="237744" cy="237744"/>
           </a:xfrm>
           <a:prstGeom prst="ellipse">
@@ -7560,7 +7680,7 @@
         </p:nvSpPr>
         <p:spPr>
           <a:xfrm>
-            <a:off x="957422" y="2625594"/>
+            <a:off x="957422" y="2484175"/>
             <a:ext cx="237744" cy="237744"/>
           </a:xfrm>
           <a:prstGeom prst="rect">
@@ -7605,7 +7725,7 @@
         </p:nvSpPr>
         <p:spPr>
           <a:xfrm>
-            <a:off x="1268317" y="2616450"/>
+            <a:off x="1268317" y="2475031"/>
             <a:ext cx="1499615" cy="274320"/>
           </a:xfrm>
           <a:prstGeom prst="rect">
@@ -7694,7 +7814,7 @@
         </p:nvSpPr>
         <p:spPr>
           <a:xfrm>
-            <a:off x="784194" y="2871600"/>
+            <a:off x="824100" y="2702014"/>
             <a:ext cx="1779697" cy="416550"/>
           </a:xfrm>
           <a:prstGeom prst="rect">
@@ -7798,7 +7918,7 @@
         </p:nvSpPr>
         <p:spPr>
           <a:xfrm>
-            <a:off x="3292214" y="2535078"/>
+            <a:off x="3292214" y="2393659"/>
             <a:ext cx="2261339" cy="1123564"/>
           </a:xfrm>
           <a:prstGeom prst="roundRect">
@@ -7837,7 +7957,7 @@
         </p:nvSpPr>
         <p:spPr>
           <a:xfrm>
-            <a:off x="3771113" y="2625594"/>
+            <a:off x="3771113" y="2484175"/>
             <a:ext cx="237744" cy="237744"/>
           </a:xfrm>
           <a:prstGeom prst="ellipse">
@@ -7870,7 +7990,7 @@
         </p:nvSpPr>
         <p:spPr>
           <a:xfrm>
-            <a:off x="3771113" y="2625594"/>
+            <a:off x="3771113" y="2484175"/>
             <a:ext cx="237744" cy="237744"/>
           </a:xfrm>
           <a:prstGeom prst="rect">
@@ -7915,7 +8035,7 @@
         </p:nvSpPr>
         <p:spPr>
           <a:xfrm>
-            <a:off x="4082009" y="2616450"/>
+            <a:off x="4082009" y="2475031"/>
             <a:ext cx="968304" cy="274320"/>
           </a:xfrm>
           <a:prstGeom prst="rect">
@@ -7960,7 +8080,7 @@
         </p:nvSpPr>
         <p:spPr>
           <a:xfrm>
-            <a:off x="3359332" y="2797852"/>
+            <a:off x="3359332" y="2656433"/>
             <a:ext cx="2478423" cy="888243"/>
           </a:xfrm>
           <a:prstGeom prst="rect">
@@ -8140,7 +8260,7 @@
         </p:nvSpPr>
         <p:spPr>
           <a:xfrm>
-            <a:off x="5916145" y="2535078"/>
+            <a:off x="5916145" y="2393659"/>
             <a:ext cx="2261339" cy="1123564"/>
           </a:xfrm>
           <a:prstGeom prst="roundRect">
@@ -8179,7 +8299,7 @@
         </p:nvSpPr>
         <p:spPr>
           <a:xfrm>
-            <a:off x="6461633" y="2625594"/>
+            <a:off x="6461633" y="2484175"/>
             <a:ext cx="237744" cy="237744"/>
           </a:xfrm>
           <a:prstGeom prst="ellipse">
@@ -8212,7 +8332,7 @@
         </p:nvSpPr>
         <p:spPr>
           <a:xfrm>
-            <a:off x="6461633" y="2625594"/>
+            <a:off x="6461633" y="2484175"/>
             <a:ext cx="237744" cy="237744"/>
           </a:xfrm>
           <a:prstGeom prst="rect">
@@ -8257,7 +8377,7 @@
         </p:nvSpPr>
         <p:spPr>
           <a:xfrm>
-            <a:off x="6772529" y="2616450"/>
+            <a:off x="6772529" y="2475031"/>
             <a:ext cx="1243584" cy="274320"/>
           </a:xfrm>
           <a:prstGeom prst="rect">
@@ -8302,7 +8422,7 @@
         </p:nvSpPr>
         <p:spPr>
           <a:xfrm>
-            <a:off x="5962092" y="2892537"/>
+            <a:off x="5962092" y="2751118"/>
             <a:ext cx="2261338" cy="625829"/>
           </a:xfrm>
           <a:prstGeom prst="rect">
@@ -8329,7 +8449,7 @@
                 <a:latin typeface="Microsoft YaHei" pitchFamily="34" charset="0"/>
                 <a:ea typeface="Microsoft YaHei" pitchFamily="34" charset="-122"/>
               </a:rPr>
-              <a:t>当一个章节被切成多块，把上一块结尾的完整句（总量 ≤100 字），接到下一块的开头。</a:t>
+              <a:t>当一个章节被切成多块，把上一块结尾的完整句（总量 ≤100 ），接到下一块的开头。</a:t>
             </a:r>
             <a:endParaRPr lang="en-US" sz="1200" dirty="0">
               <a:solidFill>
@@ -8355,7 +8475,7 @@
         </p:nvSpPr>
         <p:spPr>
           <a:xfrm>
-            <a:off x="8540076" y="2535078"/>
+            <a:off x="8540076" y="2393659"/>
             <a:ext cx="2182729" cy="1123564"/>
           </a:xfrm>
           <a:prstGeom prst="roundRect">
@@ -8394,7 +8514,7 @@
         </p:nvSpPr>
         <p:spPr>
           <a:xfrm>
-            <a:off x="9095012" y="2625594"/>
+            <a:off x="9095012" y="2484175"/>
             <a:ext cx="237744" cy="237744"/>
           </a:xfrm>
           <a:prstGeom prst="ellipse">
@@ -8427,7 +8547,7 @@
         </p:nvSpPr>
         <p:spPr>
           <a:xfrm>
-            <a:off x="9095012" y="2625594"/>
+            <a:off x="9095012" y="2484175"/>
             <a:ext cx="237744" cy="237744"/>
           </a:xfrm>
           <a:prstGeom prst="rect">
@@ -8472,7 +8592,7 @@
         </p:nvSpPr>
         <p:spPr>
           <a:xfrm>
-            <a:off x="9405908" y="2616450"/>
+            <a:off x="9405908" y="2475031"/>
             <a:ext cx="1243584" cy="274320"/>
           </a:xfrm>
           <a:prstGeom prst="rect">
@@ -8517,7 +8637,7 @@
         </p:nvSpPr>
         <p:spPr>
           <a:xfrm>
-            <a:off x="8684455" y="2927816"/>
+            <a:off x="8636028" y="2782736"/>
             <a:ext cx="2348779" cy="499095"/>
           </a:xfrm>
           <a:prstGeom prst="rect">
@@ -8613,8 +8733,8 @@
         </p:nvSpPr>
         <p:spPr>
           <a:xfrm>
-            <a:off x="301625" y="3821910"/>
-            <a:ext cx="4623766" cy="276999"/>
+            <a:off x="301625" y="3795386"/>
+            <a:ext cx="4623766" cy="246221"/>
           </a:xfrm>
           <a:prstGeom prst="rect">
             <a:avLst/>
@@ -8734,31 +8854,23 @@
           <a:p>
             <a:pPr eaLnBrk="1" hangingPunct="1"/>
             <a:r>
-              <a:rPr lang="en-US" altLang="zh-CN">
-                <a:latin typeface="微软雅黑" panose="020B0503020204020204" pitchFamily="34" charset="-122"/>
-                <a:ea typeface="微软雅黑" panose="020B0503020204020204" pitchFamily="34" charset="-122"/>
-                <a:sym typeface="+mn-ea"/>
-              </a:rPr>
-              <a:t>2.</a:t>
-            </a:r>
-            <a:r>
-              <a:rPr lang="en-US" altLang="zh-CN">
+              <a:rPr lang="en-US" altLang="zh-CN" sz="1600" b="1">
                 <a:latin typeface="Times New Roman" panose="02020603050405020304" pitchFamily="18" charset="0"/>
                 <a:ea typeface="微软雅黑" panose="020B0503020204020204" pitchFamily="34" charset="-122"/>
                 <a:cs typeface="Times New Roman" panose="02020603050405020304" pitchFamily="18" charset="0"/>
                 <a:sym typeface="+mn-ea"/>
               </a:rPr>
-              <a:t>Trunk</a:t>
-            </a:r>
-            <a:r>
-              <a:rPr lang="zh-CN" altLang="en-US">
+              <a:t>2.Chunk</a:t>
+            </a:r>
+            <a:r>
+              <a:rPr lang="zh-CN" altLang="en-US" sz="1600" b="1">
                 <a:latin typeface="微软雅黑" panose="020B0503020204020204" pitchFamily="34" charset="-122"/>
                 <a:ea typeface="微软雅黑" panose="020B0503020204020204" pitchFamily="34" charset="-122"/>
                 <a:sym typeface="+mn-ea"/>
               </a:rPr>
-              <a:t>知识块形式</a:t>
-            </a:r>
-            <a:endParaRPr lang="en-US" altLang="zh-CN">
+              <a:t>块形式</a:t>
+            </a:r>
+            <a:endParaRPr lang="en-US" altLang="zh-CN" sz="1600" b="1">
               <a:latin typeface="微软雅黑" panose="020B0503020204020204" pitchFamily="34" charset="-122"/>
               <a:ea typeface="微软雅黑" panose="020B0503020204020204" pitchFamily="34" charset="-122"/>
             </a:endParaRPr>
@@ -9016,7 +9128,7 @@
         </p:nvSpPr>
         <p:spPr>
           <a:xfrm>
-            <a:off x="691298" y="3241547"/>
+            <a:off x="704358" y="3050999"/>
             <a:ext cx="2261339" cy="461665"/>
           </a:xfrm>
           <a:prstGeom prst="rect">
@@ -9345,7 +9457,7 @@
         </p:nvSpPr>
         <p:spPr>
           <a:xfrm>
-            <a:off x="277191" y="71213"/>
+            <a:off x="277191" y="131845"/>
             <a:ext cx="2493440" cy="415498"/>
           </a:xfrm>
           <a:prstGeom prst="rect">
@@ -9533,8 +9645,8 @@
         </p:nvSpPr>
         <p:spPr>
           <a:xfrm>
-            <a:off x="212597" y="562503"/>
-            <a:ext cx="11623930" cy="861774"/>
+            <a:off x="271161" y="551949"/>
+            <a:ext cx="11623930" cy="923330"/>
           </a:xfrm>
           <a:prstGeom prst="rect">
             <a:avLst/>
@@ -9551,25 +9663,129 @@
               <a:buNone/>
             </a:pPr>
             <a:r>
-              <a:rPr lang="en-US" altLang="zh-CN">
+              <a:rPr lang="en-US" altLang="zh-CN" sz="1600" b="1">
+                <a:latin typeface="Times New Roman" panose="02020603050405020304" pitchFamily="18" charset="0"/>
+                <a:ea typeface="微软雅黑" panose="020B0503020204020204" pitchFamily="34" charset="-122"/>
+                <a:cs typeface="Times New Roman" panose="02020603050405020304" pitchFamily="18" charset="0"/>
+              </a:rPr>
+              <a:t>3.</a:t>
+            </a:r>
+            <a:r>
+              <a:rPr lang="en-US" altLang="zh-CN" sz="1600" b="1">
                 <a:latin typeface="微软雅黑" panose="020B0503020204020204" pitchFamily="34" charset="-122"/>
                 <a:ea typeface="微软雅黑" panose="020B0503020204020204" pitchFamily="34" charset="-122"/>
               </a:rPr>
               <a:t>双路</a:t>
             </a:r>
             <a:r>
-              <a:rPr lang="zh-CN" altLang="en-US">
+              <a:rPr lang="zh-CN" altLang="en-US" sz="1600" b="1">
                 <a:latin typeface="微软雅黑" panose="020B0503020204020204" pitchFamily="34" charset="-122"/>
                 <a:ea typeface="微软雅黑" panose="020B0503020204020204" pitchFamily="34" charset="-122"/>
               </a:rPr>
               <a:t>并行</a:t>
             </a:r>
             <a:r>
-              <a:rPr lang="en-US" altLang="zh-CN">
+              <a:rPr lang="en-US" altLang="zh-CN" sz="1600" b="1">
                 <a:latin typeface="微软雅黑" panose="020B0503020204020204" pitchFamily="34" charset="-122"/>
                 <a:ea typeface="微软雅黑" panose="020B0503020204020204" pitchFamily="34" charset="-122"/>
               </a:rPr>
               <a:t>召回：</a:t>
+            </a:r>
+            <a:r>
+              <a:rPr lang="en-US" altLang="zh-CN" sz="1600" b="1">
+                <a:latin typeface="Times New Roman" panose="02020603050405020304" pitchFamily="18" charset="0"/>
+                <a:ea typeface="微软雅黑" panose="020B0503020204020204" pitchFamily="34" charset="-122"/>
+                <a:cs typeface="Times New Roman" panose="02020603050405020304" pitchFamily="18" charset="0"/>
+              </a:rPr>
+              <a:t>bge</a:t>
+            </a:r>
+            <a:r>
+              <a:rPr lang="en-US" altLang="zh-CN" sz="1600" b="1">
+                <a:latin typeface="微软雅黑" panose="020B0503020204020204" pitchFamily="34" charset="-122"/>
+                <a:ea typeface="微软雅黑" panose="020B0503020204020204" pitchFamily="34" charset="-122"/>
+              </a:rPr>
+              <a:t>语义</a:t>
+            </a:r>
+            <a:r>
+              <a:rPr lang="zh-CN" altLang="en-US" sz="1600" b="1">
+                <a:latin typeface="微软雅黑" panose="020B0503020204020204" pitchFamily="34" charset="-122"/>
+                <a:ea typeface="微软雅黑" panose="020B0503020204020204" pitchFamily="34" charset="-122"/>
+              </a:rPr>
+              <a:t>检索</a:t>
+            </a:r>
+            <a:r>
+              <a:rPr lang="en-US" altLang="zh-CN" sz="1600" b="1">
+                <a:latin typeface="微软雅黑" panose="020B0503020204020204" pitchFamily="34" charset="-122"/>
+                <a:ea typeface="微软雅黑" panose="020B0503020204020204" pitchFamily="34" charset="-122"/>
+              </a:rPr>
+              <a:t> + </a:t>
+            </a:r>
+            <a:r>
+              <a:rPr lang="en-US" altLang="zh-CN" sz="1600" b="1">
+                <a:latin typeface="Times New Roman" panose="02020603050405020304" pitchFamily="18" charset="0"/>
+                <a:ea typeface="微软雅黑" panose="020B0503020204020204" pitchFamily="34" charset="-122"/>
+                <a:cs typeface="Times New Roman" panose="02020603050405020304" pitchFamily="18" charset="0"/>
+              </a:rPr>
+              <a:t>BM25</a:t>
+            </a:r>
+            <a:r>
+              <a:rPr lang="zh-CN" altLang="en-US" sz="1600" b="1">
+                <a:latin typeface="微软雅黑" panose="020B0503020204020204" pitchFamily="34" charset="-122"/>
+                <a:ea typeface="微软雅黑" panose="020B0503020204020204" pitchFamily="34" charset="-122"/>
+              </a:rPr>
+              <a:t>字面匹配</a:t>
+            </a:r>
+            <a:r>
+              <a:rPr lang="en-US" altLang="zh-CN" sz="1600" b="1">
+                <a:latin typeface="微软雅黑" panose="020B0503020204020204" pitchFamily="34" charset="-122"/>
+                <a:ea typeface="微软雅黑" panose="020B0503020204020204" pitchFamily="34" charset="-122"/>
+              </a:rPr>
+              <a:t>，</a:t>
+            </a:r>
+            <a:r>
+              <a:rPr lang="en-US" altLang="zh-CN" sz="1600" b="1">
+                <a:latin typeface="Times New Roman" panose="02020603050405020304" pitchFamily="18" charset="0"/>
+                <a:ea typeface="微软雅黑" panose="020B0503020204020204" pitchFamily="34" charset="-122"/>
+                <a:cs typeface="Times New Roman" panose="02020603050405020304" pitchFamily="18" charset="0"/>
+              </a:rPr>
+              <a:t>RRF</a:t>
+            </a:r>
+            <a:r>
+              <a:rPr lang="zh-CN" altLang="en-US" sz="1600" b="1">
+                <a:latin typeface="微软雅黑" panose="020B0503020204020204" pitchFamily="34" charset="-122"/>
+                <a:ea typeface="微软雅黑" panose="020B0503020204020204" pitchFamily="34" charset="-122"/>
+              </a:rPr>
+              <a:t>加权排名</a:t>
+            </a:r>
+            <a:endParaRPr lang="en-US" altLang="zh-CN" sz="1600" b="1">
+              <a:latin typeface="微软雅黑" panose="020B0503020204020204" pitchFamily="34" charset="-122"/>
+              <a:ea typeface="微软雅黑" panose="020B0503020204020204" pitchFamily="34" charset="-122"/>
+            </a:endParaRPr>
+          </a:p>
+          <a:p>
+            <a:r>
+              <a:rPr lang="zh-CN" altLang="zh-CN">
+                <a:latin typeface="Times New Roman" panose="02020603050405020304" pitchFamily="18" charset="0"/>
+                <a:ea typeface="微软雅黑" panose="020B0503020204020204" pitchFamily="34" charset="-122"/>
+                <a:cs typeface="Times New Roman" panose="02020603050405020304" pitchFamily="18" charset="0"/>
+              </a:rPr>
+              <a:t>bge（</a:t>
+            </a:r>
+            <a:r>
+              <a:rPr lang="zh-CN" altLang="zh-CN" sz="1600"/>
+              <a:t>向量检索</a:t>
+            </a:r>
+            <a:r>
+              <a:rPr lang="zh-CN" altLang="zh-CN">
+                <a:latin typeface="Times New Roman" panose="02020603050405020304" pitchFamily="18" charset="0"/>
+                <a:ea typeface="微软雅黑" panose="020B0503020204020204" pitchFamily="34" charset="-122"/>
+                <a:cs typeface="Times New Roman" panose="02020603050405020304" pitchFamily="18" charset="0"/>
+              </a:rPr>
+              <a:t>）</a:t>
+            </a:r>
+            <a:r>
+              <a:rPr lang="zh-CN" altLang="zh-CN" sz="1600"/>
+              <a:t>：</a:t>
             </a:r>
             <a:r>
               <a:rPr lang="en-US" altLang="zh-CN">
@@ -9577,28 +9793,11 @@
                 <a:ea typeface="微软雅黑" panose="020B0503020204020204" pitchFamily="34" charset="-122"/>
                 <a:cs typeface="Times New Roman" panose="02020603050405020304" pitchFamily="18" charset="0"/>
               </a:rPr>
-              <a:t>bge</a:t>
-            </a:r>
-            <a:r>
-              <a:rPr lang="en-US" altLang="zh-CN">
-                <a:latin typeface="微软雅黑" panose="020B0503020204020204" pitchFamily="34" charset="-122"/>
-                <a:ea typeface="微软雅黑" panose="020B0503020204020204" pitchFamily="34" charset="-122"/>
-              </a:rPr>
-              <a:t>语义</a:t>
-            </a:r>
-            <a:r>
-              <a:rPr lang="zh-CN" altLang="en-US">
-                <a:latin typeface="微软雅黑" panose="020B0503020204020204" pitchFamily="34" charset="-122"/>
-                <a:ea typeface="微软雅黑" panose="020B0503020204020204" pitchFamily="34" charset="-122"/>
-              </a:rPr>
-              <a:t>检索</a:t>
-            </a:r>
-            <a:r>
-              <a:rPr lang="en-US" altLang="zh-CN">
-                <a:latin typeface="微软雅黑" panose="020B0503020204020204" pitchFamily="34" charset="-122"/>
-                <a:ea typeface="微软雅黑" panose="020B0503020204020204" pitchFamily="34" charset="-122"/>
-              </a:rPr>
-              <a:t> + </a:t>
+              <a:t>query</a:t>
+            </a:r>
+            <a:r>
+              <a:rPr lang="zh-CN" altLang="zh-CN" sz="1600"/>
+              <a:t>和每个</a:t>
             </a:r>
             <a:r>
               <a:rPr lang="en-US" altLang="zh-CN">
@@ -9606,21 +9805,69 @@
                 <a:ea typeface="微软雅黑" panose="020B0503020204020204" pitchFamily="34" charset="-122"/>
                 <a:cs typeface="Times New Roman" panose="02020603050405020304" pitchFamily="18" charset="0"/>
               </a:rPr>
-              <a:t>BM25</a:t>
-            </a:r>
-            <a:r>
-              <a:rPr lang="zh-CN" altLang="en-US">
-                <a:latin typeface="微软雅黑" panose="020B0503020204020204" pitchFamily="34" charset="-122"/>
+              <a:t>Chunk</a:t>
+            </a:r>
+            <a:r>
+              <a:rPr lang="zh-CN" altLang="en-US" sz="1600"/>
+              <a:t>的</a:t>
+            </a:r>
+            <a:r>
+              <a:rPr lang="zh-CN" altLang="zh-CN" sz="1600"/>
+              <a:t>余弦距离</a:t>
+            </a:r>
+            <a:r>
+              <a:rPr lang="zh-CN" altLang="en-US" sz="1600"/>
+              <a:t>越近</a:t>
+            </a:r>
+            <a:r>
+              <a:rPr lang="zh-CN" altLang="zh-CN" sz="1600"/>
+              <a:t>，</a:t>
+            </a:r>
+            <a:r>
+              <a:rPr lang="zh-CN" altLang="en-US" sz="1600"/>
+              <a:t>二者相似相似度越高，</a:t>
+            </a:r>
+            <a:r>
+              <a:rPr lang="zh-CN" altLang="zh-CN" sz="1600"/>
+              <a:t>解决“意思相近但用词不同”的召回。</a:t>
+            </a:r>
+          </a:p>
+          <a:p>
+            <a:r>
+              <a:rPr lang="zh-CN" altLang="zh-CN">
+                <a:latin typeface="Times New Roman" panose="02020603050405020304" pitchFamily="18" charset="0"/>
                 <a:ea typeface="微软雅黑" panose="020B0503020204020204" pitchFamily="34" charset="-122"/>
-              </a:rPr>
-              <a:t>字面匹配</a:t>
-            </a:r>
-            <a:r>
-              <a:rPr lang="en-US" altLang="zh-CN">
-                <a:latin typeface="微软雅黑" panose="020B0503020204020204" pitchFamily="34" charset="-122"/>
+                <a:cs typeface="Times New Roman" panose="02020603050405020304" pitchFamily="18" charset="0"/>
+              </a:rPr>
+              <a:t>BM25（</a:t>
+            </a:r>
+            <a:r>
+              <a:rPr lang="zh-CN" altLang="zh-CN" sz="1600"/>
+              <a:t>关键词检索</a:t>
+            </a:r>
+            <a:r>
+              <a:rPr lang="zh-CN" altLang="zh-CN">
+                <a:latin typeface="Times New Roman" panose="02020603050405020304" pitchFamily="18" charset="0"/>
                 <a:ea typeface="微软雅黑" panose="020B0503020204020204" pitchFamily="34" charset="-122"/>
-              </a:rPr>
-              <a:t>，</a:t>
+                <a:cs typeface="Times New Roman" panose="02020603050405020304" pitchFamily="18" charset="0"/>
+              </a:rPr>
+              <a:t>）</a:t>
+            </a:r>
+            <a:r>
+              <a:rPr lang="zh-CN" altLang="zh-CN" sz="1600"/>
+              <a:t>：</a:t>
+            </a:r>
+            <a:r>
+              <a:rPr lang="zh-CN" altLang="zh-CN">
+                <a:latin typeface="Times New Roman" panose="02020603050405020304" pitchFamily="18" charset="0"/>
+                <a:ea typeface="微软雅黑" panose="020B0503020204020204" pitchFamily="34" charset="-122"/>
+                <a:cs typeface="Times New Roman" panose="02020603050405020304" pitchFamily="18" charset="0"/>
+              </a:rPr>
+              <a:t>query </a:t>
+            </a:r>
+            <a:r>
+              <a:rPr lang="zh-CN" altLang="zh-CN" sz="1600"/>
+              <a:t>里的词在</a:t>
             </a:r>
             <a:r>
               <a:rPr lang="en-US" altLang="zh-CN">
@@ -9628,54 +9875,35 @@
                 <a:ea typeface="微软雅黑" panose="020B0503020204020204" pitchFamily="34" charset="-122"/>
                 <a:cs typeface="Times New Roman" panose="02020603050405020304" pitchFamily="18" charset="0"/>
               </a:rPr>
-              <a:t>RRF</a:t>
-            </a:r>
-            <a:r>
-              <a:rPr lang="zh-CN" altLang="en-US">
-                <a:latin typeface="微软雅黑" panose="020B0503020204020204" pitchFamily="34" charset="-122"/>
-                <a:ea typeface="微软雅黑" panose="020B0503020204020204" pitchFamily="34" charset="-122"/>
-              </a:rPr>
-              <a:t>加权排名</a:t>
-            </a:r>
-            <a:endParaRPr lang="en-US" altLang="zh-CN">
-              <a:latin typeface="微软雅黑" panose="020B0503020204020204" pitchFamily="34" charset="-122"/>
-              <a:ea typeface="微软雅黑" panose="020B0503020204020204" pitchFamily="34" charset="-122"/>
-            </a:endParaRPr>
-          </a:p>
-          <a:p>
-            <a:r>
-              <a:rPr lang="zh-CN" altLang="zh-CN" sz="1600">
+              <a:t>Chunk</a:t>
+            </a:r>
+            <a:r>
+              <a:rPr lang="zh-CN" altLang="zh-CN" sz="1600"/>
+              <a:t>里命中得越多、命中的词越稀有，</a:t>
+            </a:r>
+            <a:r>
+              <a:rPr lang="en-US" altLang="zh-CN">
                 <a:latin typeface="Times New Roman" panose="02020603050405020304" pitchFamily="18" charset="0"/>
                 <a:ea typeface="微软雅黑" panose="020B0503020204020204" pitchFamily="34" charset="-122"/>
                 <a:cs typeface="Times New Roman" panose="02020603050405020304" pitchFamily="18" charset="0"/>
               </a:rPr>
-              <a:t>bge</a:t>
+              <a:t>Chunk</a:t>
+            </a:r>
+            <a:r>
+              <a:rPr lang="zh-CN" altLang="en-US" sz="1600"/>
+              <a:t>的</a:t>
             </a:r>
             <a:r>
               <a:rPr lang="zh-CN" altLang="zh-CN" sz="1600"/>
-              <a:t>（向量检索）：把查询和每个块都</a:t>
+              <a:t>分就越高</a:t>
             </a:r>
             <a:r>
               <a:rPr lang="zh-CN" altLang="en-US" sz="1600"/>
-              <a:t>编码</a:t>
+              <a:t>，</a:t>
             </a:r>
             <a:r>
               <a:rPr lang="zh-CN" altLang="zh-CN" sz="1600"/>
-              <a:t>成语义向量再比余弦距离，解决“意思相近但用词不同”的召回。</a:t>
-            </a:r>
-          </a:p>
-          <a:p>
-            <a:r>
-              <a:rPr lang="zh-CN" altLang="zh-CN" sz="1600">
-                <a:latin typeface="Times New Roman" panose="02020603050405020304" pitchFamily="18" charset="0"/>
-                <a:ea typeface="微软雅黑" panose="020B0503020204020204" pitchFamily="34" charset="-122"/>
-                <a:cs typeface="Times New Roman" panose="02020603050405020304" pitchFamily="18" charset="0"/>
-              </a:rPr>
-              <a:t>BM25（</a:t>
-            </a:r>
-            <a:r>
-              <a:rPr lang="zh-CN" altLang="zh-CN" sz="1600"/>
-              <a:t>关键词检索）：先分词再查倒排表，按“稀有词权重高 + 词频和块长归一”打分，解决专有名词字面命中的召回。</a:t>
+              <a:t>解决专有名词的召回。</a:t>
             </a:r>
           </a:p>
         </p:txBody>
@@ -10499,11 +10727,22 @@
                 <a:solidFill>
                   <a:srgbClr val="0D0D0D"/>
                 </a:solidFill>
+                <a:latin typeface="Times New Roman" panose="02020603050405020304" pitchFamily="18" charset="0"/>
+                <a:ea typeface="Microsoft YaHei" pitchFamily="34" charset="-122"/>
+                <a:cs typeface="Times New Roman" panose="02020603050405020304" pitchFamily="18" charset="0"/>
+              </a:rPr>
+              <a:t>BM25 </a:t>
+            </a:r>
+            <a:r>
+              <a:rPr lang="en-US" sz="1400" b="1">
+                <a:solidFill>
+                  <a:srgbClr val="0D0D0D"/>
+                </a:solidFill>
                 <a:latin typeface="Microsoft YaHei" pitchFamily="34" charset="0"/>
                 <a:ea typeface="Microsoft YaHei" pitchFamily="34" charset="-122"/>
                 <a:cs typeface="Microsoft YaHei" pitchFamily="34" charset="-120"/>
               </a:rPr>
-              <a:t>BM25 关键词检索</a:t>
+              <a:t>关键词检索</a:t>
             </a:r>
             <a:endParaRPr lang="en-US" sz="1400" dirty="0"/>
           </a:p>
@@ -11019,7 +11258,18 @@
               <a:buNone/>
             </a:pPr>
             <a:r>
-              <a:rPr lang="en-US" sz="1250" b="1" dirty="0">
+              <a:rPr lang="en-US" sz="1400" b="1" dirty="0">
+                <a:solidFill>
+                  <a:srgbClr val="0D0D0D"/>
+                </a:solidFill>
+                <a:latin typeface="Times New Roman" panose="02020603050405020304" pitchFamily="18" charset="0"/>
+                <a:ea typeface="Microsoft YaHei" pitchFamily="34" charset="-122"/>
+                <a:cs typeface="Times New Roman" panose="02020603050405020304" pitchFamily="18" charset="0"/>
+              </a:rPr>
+              <a:t>RRF </a:t>
+            </a:r>
+            <a:r>
+              <a:rPr lang="en-US" sz="1250" b="1">
                 <a:solidFill>
                   <a:srgbClr val="0D0D0D"/>
                 </a:solidFill>
@@ -11027,7 +11277,18 @@
                 <a:ea typeface="Microsoft YaHei" pitchFamily="34" charset="-122"/>
                 <a:cs typeface="Microsoft YaHei" pitchFamily="34" charset="-120"/>
               </a:rPr>
-              <a:t>RRF 融合 · 只看排名，不比分数</a:t>
+              <a:t>融合 </a:t>
+            </a:r>
+            <a:r>
+              <a:rPr lang="en-US" sz="1250" b="1" dirty="0">
+                <a:solidFill>
+                  <a:srgbClr val="0D0D0D"/>
+                </a:solidFill>
+                <a:latin typeface="Microsoft YaHei" pitchFamily="34" charset="0"/>
+                <a:ea typeface="Microsoft YaHei" pitchFamily="34" charset="-122"/>
+                <a:cs typeface="Microsoft YaHei" pitchFamily="34" charset="-120"/>
+              </a:rPr>
+              <a:t>· 只看排名，不比分数</a:t>
             </a:r>
             <a:endParaRPr lang="en-US" sz="1250" dirty="0"/>
           </a:p>
@@ -11440,7 +11701,7 @@
         </p:nvSpPr>
         <p:spPr>
           <a:xfrm>
-            <a:off x="204788" y="77142"/>
+            <a:off x="274321" y="120166"/>
             <a:ext cx="2493440" cy="415498"/>
           </a:xfrm>
           <a:prstGeom prst="rect">
@@ -11646,21 +11907,21 @@
               <a:buNone/>
             </a:pPr>
             <a:r>
-              <a:rPr lang="en-US" altLang="zh-CN">
+              <a:rPr lang="en-US" altLang="zh-CN" sz="1600" b="1">
                 <a:latin typeface="Times New Roman" panose="02020603050405020304" pitchFamily="18" charset="0"/>
                 <a:ea typeface="微软雅黑" panose="020B0503020204020204" pitchFamily="34" charset="-122"/>
                 <a:cs typeface="Times New Roman" panose="02020603050405020304" pitchFamily="18" charset="0"/>
               </a:rPr>
-              <a:t>Rerank</a:t>
-            </a:r>
-            <a:r>
-              <a:rPr lang="zh-CN" altLang="en-US">
+              <a:t>4.Rerank</a:t>
+            </a:r>
+            <a:r>
+              <a:rPr lang="zh-CN" altLang="en-US" sz="1600" b="1">
                 <a:latin typeface="微软雅黑" panose="020B0503020204020204" pitchFamily="34" charset="-122"/>
                 <a:ea typeface="微软雅黑" panose="020B0503020204020204" pitchFamily="34" charset="-122"/>
               </a:rPr>
               <a:t>精排</a:t>
             </a:r>
-            <a:endParaRPr lang="en-US" altLang="zh-CN">
+            <a:endParaRPr lang="en-US" altLang="zh-CN" sz="1600" b="1">
               <a:latin typeface="微软雅黑" panose="020B0503020204020204" pitchFamily="34" charset="-122"/>
               <a:ea typeface="微软雅黑" panose="020B0503020204020204" pitchFamily="34" charset="-122"/>
             </a:endParaRPr>
@@ -11679,7 +11940,7 @@
                 <a:ea typeface="微软雅黑" panose="020B0503020204020204" pitchFamily="34" charset="-122"/>
                 <a:cs typeface="Times New Roman" panose="02020603050405020304" pitchFamily="18" charset="0"/>
               </a:rPr>
-              <a:t>chunk</a:t>
+              <a:t>Chunk</a:t>
             </a:r>
             <a:r>
               <a:rPr lang="zh-CN" altLang="en-US" sz="1600">
@@ -11796,7 +12057,7 @@
                 <a:ea typeface="微软雅黑" panose="020B0503020204020204" pitchFamily="34" charset="-122"/>
                 <a:cs typeface="Times New Roman" panose="02020603050405020304" pitchFamily="18" charset="0"/>
               </a:rPr>
-              <a:t>Trunk</a:t>
+              <a:t>Chunk</a:t>
             </a:r>
             <a:r>
               <a:rPr lang="zh-CN" altLang="en-US" sz="1600">
@@ -11838,7 +12099,7 @@
         <p:spPr>
           <a:xfrm>
             <a:off x="274321" y="1338840"/>
-            <a:ext cx="4098798" cy="276999"/>
+            <a:ext cx="4098798" cy="246221"/>
           </a:xfrm>
           <a:prstGeom prst="rect">
             <a:avLst/>
@@ -11852,7 +12113,7 @@
           <a:lstStyle/>
           <a:p>
             <a:r>
-              <a:rPr>
+              <a:rPr sz="1600">
                 <a:latin typeface="Times New Roman" panose="02020603050405020304" pitchFamily="18" charset="0"/>
                 <a:ea typeface="微软雅黑" panose="020B0503020204020204" pitchFamily="34" charset="-122"/>
                 <a:cs typeface="Times New Roman" panose="02020603050405020304" pitchFamily="18" charset="0"/>
@@ -11860,14 +12121,14 @@
               <a:t>为什么 Reranker 更懂「是否对题」</a:t>
             </a:r>
             <a:r>
-              <a:rPr lang="zh-CN" altLang="en-US">
+              <a:rPr lang="zh-CN" altLang="en-US" sz="1600">
                 <a:latin typeface="Times New Roman" panose="02020603050405020304" pitchFamily="18" charset="0"/>
                 <a:ea typeface="微软雅黑" panose="020B0503020204020204" pitchFamily="34" charset="-122"/>
                 <a:cs typeface="Times New Roman" panose="02020603050405020304" pitchFamily="18" charset="0"/>
               </a:rPr>
               <a:t>？</a:t>
             </a:r>
-            <a:endParaRPr>
+            <a:endParaRPr sz="1600">
               <a:latin typeface="Times New Roman" panose="02020603050405020304" pitchFamily="18" charset="0"/>
               <a:ea typeface="微软雅黑" panose="020B0503020204020204" pitchFamily="34" charset="-122"/>
               <a:cs typeface="Times New Roman" panose="02020603050405020304" pitchFamily="18" charset="0"/>
@@ -11883,7 +12144,7 @@
         </p:nvSpPr>
         <p:spPr>
           <a:xfrm>
-            <a:off x="329185" y="1718188"/>
+            <a:off x="338549" y="1683886"/>
             <a:ext cx="3376612" cy="1024128"/>
           </a:xfrm>
           <a:prstGeom prst="roundRect">
@@ -12084,7 +12345,7 @@
         </p:nvSpPr>
         <p:spPr>
           <a:xfrm>
-            <a:off x="4108991" y="1707278"/>
+            <a:off x="4118355" y="1672976"/>
             <a:ext cx="3376612" cy="1024128"/>
           </a:xfrm>
           <a:prstGeom prst="roundRect">
@@ -12153,6 +12414,25 @@
               </a:rPr>
               <a:t>精排最高分低于 0.3 即判「证据不足」，宁缺毋滥不硬答</a:t>
             </a:r>
+            <a:r>
+              <a:rPr lang="zh-CN" altLang="en-US" sz="1200" b="0">
+                <a:solidFill>
+                  <a:srgbClr val="595959"/>
+                </a:solidFill>
+                <a:latin typeface="Microsoft YaHei"/>
+                <a:ea typeface="Microsoft YaHei"/>
+                <a:cs typeface="Microsoft YaHei"/>
+              </a:rPr>
+              <a:t>。</a:t>
+            </a:r>
+            <a:endParaRPr sz="1200" b="0">
+              <a:solidFill>
+                <a:srgbClr val="595959"/>
+              </a:solidFill>
+              <a:latin typeface="Microsoft YaHei"/>
+              <a:ea typeface="Microsoft YaHei"/>
+              <a:cs typeface="Microsoft YaHei"/>
+            </a:endParaRPr>
           </a:p>
         </p:txBody>
       </p:sp>
@@ -12164,7 +12444,7 @@
         </p:nvSpPr>
         <p:spPr>
           <a:xfrm>
-            <a:off x="7888797" y="1703123"/>
+            <a:off x="7898161" y="1668821"/>
             <a:ext cx="3593592" cy="1024128"/>
           </a:xfrm>
           <a:prstGeom prst="roundRect">
@@ -12560,8 +12840,8 @@
         </p:blipFill>
         <p:spPr>
           <a:xfrm>
-            <a:off x="5806661" y="2884008"/>
-            <a:ext cx="5953956" cy="3439005"/>
+            <a:off x="5979015" y="2882348"/>
+            <a:ext cx="5843445" cy="3440665"/>
           </a:xfrm>
           <a:prstGeom prst="rect">
             <a:avLst/>
@@ -13097,16 +13377,37 @@
                 <a:latin typeface="Times New Roman" panose="02020603050405020304" pitchFamily="18" charset="0"/>
                 <a:cs typeface="Times New Roman" panose="02020603050405020304" pitchFamily="18" charset="0"/>
               </a:rPr>
-              <a:t>│ ├─ embeddings.embed_query() bge 语义召回</a:t>
-            </a:r>
-          </a:p>
-          <a:p>
+              <a:t>│ ├─ embeddings.embed_query()</a:t>
+            </a:r>
+            <a:r>
+              <a:rPr lang="en-US" altLang="zh-CN" sz="1600" spc="26">
+                <a:latin typeface="Times New Roman" panose="02020603050405020304" pitchFamily="18" charset="0"/>
+                <a:cs typeface="Times New Roman" panose="02020603050405020304" pitchFamily="18" charset="0"/>
+              </a:rPr>
+              <a:t> </a:t>
+            </a:r>
             <a:r>
               <a:rPr lang="zh-CN" altLang="zh-CN" sz="1600" spc="26">
                 <a:latin typeface="Times New Roman" panose="02020603050405020304" pitchFamily="18" charset="0"/>
                 <a:cs typeface="Times New Roman" panose="02020603050405020304" pitchFamily="18" charset="0"/>
               </a:rPr>
+              <a:t> bge 语义召回</a:t>
+            </a:r>
+          </a:p>
+          <a:p>
+            <a:r>
+              <a:rPr lang="zh-CN" altLang="zh-CN" sz="1600" spc="26">
+                <a:latin typeface="Times New Roman" panose="02020603050405020304" pitchFamily="18" charset="0"/>
+                <a:cs typeface="Times New Roman" panose="02020603050405020304" pitchFamily="18" charset="0"/>
+              </a:rPr>
               <a:t>│ ├─ localstore.bm25_top() </a:t>
+            </a:r>
+            <a:r>
+              <a:rPr lang="en-US" altLang="zh-CN" sz="1600" spc="26">
+                <a:latin typeface="Times New Roman" panose="02020603050405020304" pitchFamily="18" charset="0"/>
+                <a:cs typeface="Times New Roman" panose="02020603050405020304" pitchFamily="18" charset="0"/>
+              </a:rPr>
+              <a:t> BM25</a:t>
             </a:r>
             <a:r>
               <a:rPr lang="zh-CN" altLang="en-US" sz="1600" spc="26">
@@ -13221,7 +13522,7 @@
         </p:nvSpPr>
         <p:spPr>
           <a:xfrm>
-            <a:off x="204788" y="3361573"/>
+            <a:off x="204788" y="3214064"/>
             <a:ext cx="6096000" cy="338554"/>
           </a:xfrm>
           <a:prstGeom prst="rect">
@@ -13247,7 +13548,21 @@
                 <a:latin typeface="Times New Roman" panose="02020603050405020304" pitchFamily="18" charset="0"/>
                 <a:cs typeface="Times New Roman" panose="02020603050405020304" pitchFamily="18" charset="0"/>
               </a:rPr>
-              <a:t>代码配置：</a:t>
+              <a:t>代码逻辑：</a:t>
+            </a:r>
+            <a:r>
+              <a:rPr lang="en-US" altLang="zh-CN" sz="1600" b="1" spc="26">
+                <a:latin typeface="Times New Roman" panose="02020603050405020304" pitchFamily="18" charset="0"/>
+                <a:cs typeface="Times New Roman" panose="02020603050405020304" pitchFamily="18" charset="0"/>
+              </a:rPr>
+              <a:t>3.</a:t>
+            </a:r>
+            <a:r>
+              <a:rPr lang="zh-CN" altLang="en-US" sz="1600" b="1" spc="26">
+                <a:latin typeface="Times New Roman" panose="02020603050405020304" pitchFamily="18" charset="0"/>
+                <a:cs typeface="Times New Roman" panose="02020603050405020304" pitchFamily="18" charset="0"/>
+              </a:rPr>
+              <a:t>环境配置</a:t>
             </a:r>
             <a:endParaRPr lang="en-US" altLang="zh-CN" sz="1600" b="1" spc="26">
               <a:latin typeface="Times New Roman" panose="02020603050405020304" pitchFamily="18" charset="0"/>
